--- a/présentation/LyonFlow_Bloc4_Soutenance_v2.pptx
+++ b/présentation/LyonFlow_Bloc4_Soutenance_v2.pptx
@@ -12361,7 +12361,7 @@
                 <a:ea typeface="Calibri" pitchFamily="34" charset="-122"/>
                 <a:cs typeface="Calibri" pitchFamily="34" charset="-120"/>
               </a:rPr>
-              <a:t>Prometheus + Grafana + Alertmanager + 3 exporters</a:t>
+              <a:t>Cron + Telegram : watchdog 5 min, DAGs 30 min</a:t>
             </a:r>
             <a:endParaRPr lang="en-US" sz="1200" dirty="0"/>
           </a:p>
@@ -12379,7 +12379,7 @@
                 <a:ea typeface="Calibri" pitchFamily="34" charset="-122"/>
                 <a:cs typeface="Calibri" pitchFamily="34" charset="-120"/>
               </a:rPr>
-              <a:t>Redéployé et vérifié le 2026-07-02 : 5/5 cibles up</a:t>
+              <a:t>Hystérésis 20 % / 15 %, alerte si backup échoue</a:t>
             </a:r>
             <a:endParaRPr lang="en-US" sz="1200" dirty="0"/>
           </a:p>
@@ -12397,7 +12397,7 @@
                 <a:ea typeface="Calibri" pitchFamily="34" charset="-122"/>
                 <a:cs typeface="Calibri" pitchFamily="34" charset="-120"/>
               </a:rPr>
-              <a:t>7 groupes de règles chargés, Alertmanager lié</a:t>
+              <a:t>Cible : Prometheus + Grafana (compose prêt)</a:t>
             </a:r>
             <a:endParaRPr lang="en-US" sz="1200" dirty="0"/>
           </a:p>
@@ -12433,7 +12433,7 @@
                 <a:ea typeface="Calibri" pitchFamily="34" charset="-122"/>
                 <a:cs typeface="Calibri" pitchFamily="34" charset="-120"/>
               </a:rPr>
-              <a:t>scripts/healthcheck-vps.sh — 20 contrôles bout en bout</a:t>
+              <a:t>scripts/healthcheck-vps.sh — 33 contrôles bout en bout</a:t>
             </a:r>
             <a:endParaRPr lang="en-US" sz="1200" dirty="0"/>
           </a:p>
@@ -12880,7 +12880,7 @@
                 <a:ea typeface="Calibri" pitchFamily="34" charset="-122"/>
                 <a:cs typeface="Calibri" pitchFamily="34" charset="-120"/>
               </a:rPr>
-              <a:t>8+6</a:t>
+              <a:t>8</a:t>
             </a:r>
             <a:endParaRPr lang="en-US" sz="2200" dirty="0"/>
           </a:p>
@@ -12936,7 +12936,7 @@
                 <a:ea typeface="Calibri" pitchFamily="34" charset="-122"/>
                 <a:cs typeface="Calibri" pitchFamily="34" charset="-120"/>
               </a:rPr>
-              <a:t>+ monitoring</a:t>
+              <a:t>+ alertes Telegram</a:t>
             </a:r>
             <a:endParaRPr lang="en-US" sz="1000" dirty="0"/>
           </a:p>
@@ -13194,7 +13194,7 @@
                 <a:ea typeface="Calibri" pitchFamily="34" charset="-122"/>
                 <a:cs typeface="Calibri" pitchFamily="34" charset="-120"/>
               </a:rPr>
-              <a:t>(offsite en attente)</a:t>
+              <a:t>→ Google Drive</a:t>
             </a:r>
             <a:endParaRPr lang="en-US" sz="1000" dirty="0"/>
           </a:p>
@@ -13289,7 +13289,7 @@
                 <a:ea typeface="Calibri" pitchFamily="34" charset="-122"/>
                 <a:cs typeface="Calibri" pitchFamily="34" charset="-120"/>
               </a:rPr>
-              <a:t>+ monitoring : prometheus · grafana · alertmanager · node-exporter · postgres-exporter · nginx-exporter</a:t>
+              <a:t>+ monitoring : cron + alertes Telegram (cible : prometheus · grafana · alertmanager)</a:t>
             </a:r>
             <a:endParaRPr lang="en-US" sz="1250" dirty="0"/>
           </a:p>
@@ -23747,7 +23747,7 @@
                             <a:srgbClr val="1B2A4A"/>
                           </a:solidFill>
                         </a:rPr>
-                        <a:t>Prometheus + Alertmanager + Grafana (redéployé 2026-07-02)</a:t>
+                        <a:t>Cron + alertes Telegram (cible : Prometheus/Grafana)</a:t>
                       </a:r>
                       <a:endParaRPr lang="en-US" sz="1150" dirty="0"/>
                     </a:p>

--- a/présentation/LyonFlow_Bloc4_Soutenance_v2.pptx
+++ b/présentation/LyonFlow_Bloc4_Soutenance_v2.pptx
@@ -6168,7 +6168,7 @@
                 <a:ea typeface="Courier New" pitchFamily="34" charset="-122"/>
                 <a:cs typeface="Courier New" pitchFamily="34" charset="-120"/>
               </a:rPr>
-              <a:t>   └── (B) Déclenche l'entraînement quotidien (03h00)  →  XGBoost H+1h</a:t>
+              <a:t>   └── (B) Déclenche l'entraînement quotidien (03h38)  →  XGBoost H+1h</a:t>
             </a:r>
             <a:endParaRPr lang="en-US" sz="1250" dirty="0"/>
           </a:p>
@@ -6921,7 +6921,7 @@
                 <a:ea typeface="Calibri" pitchFamily="34" charset="-122"/>
                 <a:cs typeface="Calibri" pitchFamily="34" charset="-120"/>
               </a:rPr>
-              <a:t>dag_daily_speed_train 03h00 → MLflow Registry</a:t>
+              <a:t>dag_daily_speed_train 03h38 → MLflow Registry</a:t>
             </a:r>
             <a:endParaRPr lang="en-US" sz="1050" dirty="0"/>
           </a:p>
@@ -9832,7 +9832,7 @@
                             <a:srgbClr val="1B2A4A"/>
                           </a:solidFill>
                         </a:rPr>
-                        <a:t>03h00</a:t>
+                        <a:t>03h38</a:t>
                       </a:r>
                       <a:endParaRPr lang="en-US" sz="1050" dirty="0"/>
                     </a:p>
@@ -14890,7 +14890,7 @@
                 <a:ea typeface="Calibri" pitchFamily="34" charset="-122"/>
                 <a:cs typeface="Calibri" pitchFamily="34" charset="-120"/>
               </a:rPr>
-              <a:t>619</a:t>
+              <a:t>631</a:t>
             </a:r>
             <a:endParaRPr lang="en-US" sz="2200" dirty="0"/>
           </a:p>
@@ -14946,7 +14946,7 @@
                 <a:ea typeface="Calibri" pitchFamily="34" charset="-122"/>
                 <a:cs typeface="Calibri" pitchFamily="34" charset="-120"/>
               </a:rPr>
-              <a:t>verts (2026-07-05)</a:t>
+              <a:t>passants (2026-09-24)</a:t>
             </a:r>
             <a:endParaRPr lang="en-US" sz="1000" dirty="0"/>
           </a:p>
@@ -20030,7 +20030,7 @@
                 <a:ea typeface="Calibri" pitchFamily="34" charset="-122"/>
                 <a:cs typeface="Calibri" pitchFamily="34" charset="-120"/>
               </a:rPr>
-              <a:t>619</a:t>
+              <a:t>631</a:t>
             </a:r>
             <a:endParaRPr lang="en-US" sz="2200" dirty="0"/>
           </a:p>
@@ -20069,7 +20069,7 @@
                 <a:ea typeface="Calibri" pitchFamily="34" charset="-122"/>
                 <a:cs typeface="Calibri" pitchFamily="34" charset="-120"/>
               </a:rPr>
-              <a:t>tests verts</a:t>
+              <a:t>tests passants</a:t>
             </a:r>
             <a:endParaRPr lang="en-US" sz="1000" dirty="0"/>
           </a:p>
@@ -25054,7 +25054,7 @@
                 <a:ea typeface="Calibri" pitchFamily="34" charset="-122"/>
                 <a:cs typeface="Calibri" pitchFamily="34" charset="-120"/>
               </a:rPr>
-              <a:t>(26 actifs + 2 pausés)</a:t>
+              <a:t>(25 actifs + 3 pausés)</a:t>
             </a:r>
             <a:endParaRPr lang="en-US" sz="1000" dirty="0"/>
           </a:p>
@@ -25406,7 +25406,7 @@
                 <a:ea typeface="Calibri" pitchFamily="34" charset="-122"/>
                 <a:cs typeface="Calibri" pitchFamily="34" charset="-120"/>
               </a:rPr>
-              <a:t>34</a:t>
+              <a:t>38</a:t>
             </a:r>
             <a:endParaRPr lang="en-US" sz="2200" dirty="0"/>
           </a:p>
@@ -26583,7 +26583,7 @@
                 <a:ea typeface="Calibri" pitchFamily="34" charset="-122"/>
                 <a:cs typeface="Calibri" pitchFamily="34" charset="-120"/>
               </a:rPr>
-              <a:t>Découplage entraînement (1×/j, 03h, dag_daily_speed_train) / inférence (*/15min, dag_inference_xgboost)</a:t>
+              <a:t>Découplage entraînement (1×/j, 03h38, dag_daily_speed_train) / inférence (*/15min, dag_inference_xgboost)</a:t>
             </a:r>
             <a:endParaRPr lang="en-US" sz="1300" dirty="0"/>
           </a:p>
@@ -26838,7 +26838,7 @@
                 <a:ea typeface="Calibri" pitchFamily="34" charset="-122"/>
                 <a:cs typeface="Calibri" pitchFamily="34" charset="-120"/>
               </a:rPr>
-              <a:t>03h00</a:t>
+              <a:t>03h38</a:t>
             </a:r>
             <a:endParaRPr lang="en-US" sz="2200" dirty="0"/>
           </a:p>

--- a/présentation/LyonFlow_Bloc4_Soutenance_v2.pptx
+++ b/présentation/LyonFlow_Bloc4_Soutenance_v2.pptx
@@ -14890,7 +14890,7 @@
                 <a:ea typeface="Calibri" pitchFamily="34" charset="-122"/>
                 <a:cs typeface="Calibri" pitchFamily="34" charset="-120"/>
               </a:rPr>
-              <a:t>631</a:t>
+              <a:t>638</a:t>
             </a:r>
             <a:endParaRPr lang="en-US" sz="2200" dirty="0"/>
           </a:p>
@@ -20030,7 +20030,7 @@
                 <a:ea typeface="Calibri" pitchFamily="34" charset="-122"/>
                 <a:cs typeface="Calibri" pitchFamily="34" charset="-120"/>
               </a:rPr>
-              <a:t>631</a:t>
+              <a:t>638</a:t>
             </a:r>
             <a:endParaRPr lang="en-US" sz="2200" dirty="0"/>
           </a:p>
@@ -25054,7 +25054,7 @@
                 <a:ea typeface="Calibri" pitchFamily="34" charset="-122"/>
                 <a:cs typeface="Calibri" pitchFamily="34" charset="-120"/>
               </a:rPr>
-              <a:t>(25 actifs + 3 pausés)</a:t>
+              <a:t>(26 actifs + 2 pausés)</a:t>
             </a:r>
             <a:endParaRPr lang="en-US" sz="1000" dirty="0"/>
           </a:p>
